--- a/example3-iqr/results/report.pptx
+++ b/example3-iqr/results/report.pptx
@@ -10,7 +10,7 @@
   <p:handoutMasterIdLst>
     <p:handoutMasterId r:id="rId3"/>
   </p:handoutMasterIdLst>
-  <p:sldIdLst>
+  <p:sldIdLst xmlns:a="http://schemas.openxmlformats.org/drawingml/2006/main" xmlns:r="http://schemas.openxmlformats.org/officeDocument/2006/relationships" xmlns:p="http://schemas.openxmlformats.org/presentationml/2006/main">
     <p:sldId id="256" r:id="rId8"/>
     <p:sldId id="257" r:id="rId9"/>
     <p:sldId id="258" r:id="rId10"/>
@@ -20,6 +20,10 @@
     <p:sldId id="262" r:id="rId14"/>
     <p:sldId id="263" r:id="rId15"/>
     <p:sldId id="264" r:id="rId16"/>
+    <p:sldId id="265" r:id="rId17"/>
+    <p:sldId id="266" r:id="rId18"/>
+    <p:sldId id="267" r:id="rId19"/>
+    <p:sldId id="268" r:id="rId20"/>
   </p:sldIdLst>
   <p:sldSz cx="9144000" cy="6858000" type="screen4x3"/>
   <p:notesSz cx="6858000" cy="9144000"/>
@@ -1790,7 +1794,7 @@
           <a:chExt cx="0" cy="0"/>
         </a:xfrm>
       </p:grpSpPr>
-      <p:sp>
+      <p:sp xmlns:a="http://schemas.openxmlformats.org/drawingml/2006/main" xmlns:r="http://schemas.openxmlformats.org/officeDocument/2006/relationships" xmlns:p="http://schemas.openxmlformats.org/presentationml/2006/main">
         <p:nvSpPr>
           <p:cNvPr id="2" name="Title 1"/>
           <p:cNvSpPr>
@@ -1817,7 +1821,7 @@
           </a:p>
         </p:txBody>
       </p:sp>
-      <p:sp>
+      <p:sp xmlns:a="http://schemas.openxmlformats.org/drawingml/2006/main" xmlns:r="http://schemas.openxmlformats.org/officeDocument/2006/relationships" xmlns:p="http://schemas.openxmlformats.org/presentationml/2006/main">
         <p:nvSpPr>
           <p:cNvPr id="3" name="Subtitle 2"/>
           <p:cNvSpPr>
@@ -1844,6 +1848,612 @@
           </a:p>
         </p:txBody>
       </p:sp>
+    </p:spTree>
+  </p:cSld>
+  <p:clrMapOvr>
+    <a:masterClrMapping/>
+  </p:clrMapOvr>
+</p:sld>
+</file>
+
+<file path=ppt/slides/slide10.xml><?xml version="1.0" encoding="utf-8"?>
+<p:sld xmlns:a="http://schemas.openxmlformats.org/drawingml/2006/main" xmlns:r="http://schemas.openxmlformats.org/officeDocument/2006/relationships" xmlns:p="http://schemas.openxmlformats.org/presentationml/2006/main">
+  <p:cSld>
+    <p:spTree>
+      <p:nvGrpSpPr>
+        <p:cNvPr id="1" name=""/>
+        <p:cNvGrpSpPr/>
+        <p:nvPr/>
+      </p:nvGrpSpPr>
+      <p:grpSpPr>
+        <a:xfrm>
+          <a:off x="0" y="0"/>
+          <a:ext cx="0" cy="0"/>
+          <a:chOff x="0" y="0"/>
+          <a:chExt cx="0" cy="0"/>
+        </a:xfrm>
+      </p:grpSpPr>
+      <p:sp xmlns:a="http://schemas.openxmlformats.org/drawingml/2006/main" xmlns:r="http://schemas.openxmlformats.org/officeDocument/2006/relationships" xmlns:p="http://schemas.openxmlformats.org/presentationml/2006/main">
+        <p:nvSpPr>
+          <p:cNvPr id="2" name="Title 1"/>
+          <p:cNvSpPr>
+            <a:spLocks noGrp="1"/>
+          </p:cNvSpPr>
+          <p:nvPr>
+            <p:ph type="title"/>
+          </p:nvPr>
+        </p:nvSpPr>
+        <p:spPr>
+          <a:xfrm>
+            <a:off x="457200" y="6283"/>
+            <a:ext cx="8229600" cy="659640"/>
+          </a:xfrm>
+        </p:spPr>
+        <p:txBody>
+          <a:bodyPr/>
+          <a:lstStyle/>
+          <a:p>
+            <a:r>
+              <a:rPr/>
+              <a:t>Comparison HFDDam_over_RDDam</a:t>
+            </a:r>
+          </a:p>
+        </p:txBody>
+      </p:sp>
+      <p:sp xmlns:a="http://schemas.openxmlformats.org/drawingml/2006/main" xmlns:r="http://schemas.openxmlformats.org/officeDocument/2006/relationships" xmlns:p="http://schemas.openxmlformats.org/presentationml/2006/main">
+        <p:nvSpPr>
+          <p:cNvPr id="3" name="Text Placeholder 4"/>
+          <p:cNvSpPr>
+            <a:spLocks noGrp="1"/>
+          </p:cNvSpPr>
+          <p:nvPr>
+            <p:ph type="body" sz="quarter" idx="3"/>
+          </p:nvPr>
+        </p:nvSpPr>
+        <p:spPr>
+          <a:xfrm>
+            <a:off x="4645025" y="782905"/>
+            <a:ext cx="4041775" cy="639762"/>
+          </a:xfrm>
+        </p:spPr>
+        <p:txBody>
+          <a:bodyPr/>
+          <a:lstStyle/>
+          <a:p>
+            <a:r>
+              <a:rPr/>
+              <a:t>Differential FDR&lt;0.25</a:t>
+            </a:r>
+          </a:p>
+        </p:txBody>
+      </p:sp>
+      <p:sp xmlns:a="http://schemas.openxmlformats.org/drawingml/2006/main" xmlns:r="http://schemas.openxmlformats.org/officeDocument/2006/relationships" xmlns:p="http://schemas.openxmlformats.org/presentationml/2006/main">
+        <p:nvSpPr>
+          <p:cNvPr id="4" name="Text Placeholder 2"/>
+          <p:cNvSpPr>
+            <a:spLocks noGrp="1"/>
+          </p:cNvSpPr>
+          <p:nvPr>
+            <p:ph type="body" idx="1"/>
+          </p:nvPr>
+        </p:nvSpPr>
+        <p:spPr>
+          <a:xfrm>
+            <a:off x="457200" y="776118"/>
+            <a:ext cx="4040188" cy="639762"/>
+          </a:xfrm>
+        </p:spPr>
+        <p:txBody>
+          <a:bodyPr/>
+          <a:lstStyle/>
+          <a:p>
+            <a:r>
+              <a:rPr/>
+              <a:t>Complete Set FDR=1</a:t>
+            </a:r>
+          </a:p>
+        </p:txBody>
+      </p:sp>
+      <p:pic xmlns:a="http://schemas.openxmlformats.org/drawingml/2006/main" xmlns:r="http://schemas.openxmlformats.org/officeDocument/2006/relationships" xmlns:p="http://schemas.openxmlformats.org/presentationml/2006/main">
+        <p:nvPicPr>
+          <p:cNvPr id="5" name="" descr=""/>
+          <p:cNvPicPr>
+            <a:picLocks noGrp="1"/>
+          </p:cNvPicPr>
+          <p:nvPr>
+            <p:ph/>
+          </p:nvPr>
+        </p:nvPicPr>
+        <p:blipFill>
+          <a:blip cstate="print" r:embed="rId2"/>
+          <a:stretch>
+            <a:fillRect/>
+          </a:stretch>
+        </p:blipFill>
+        <p:spPr>
+          <a:xfrm>
+            <a:off x="4645152" y="1426464"/>
+            <a:ext cx="4114800" cy="5440680"/>
+          </a:xfrm>
+          <a:prstGeom prst="rect">
+            <a:avLst/>
+          </a:prstGeom>
+        </p:spPr>
+      </p:pic>
+      <p:pic xmlns:a="http://schemas.openxmlformats.org/drawingml/2006/main" xmlns:r="http://schemas.openxmlformats.org/officeDocument/2006/relationships" xmlns:p="http://schemas.openxmlformats.org/presentationml/2006/main">
+        <p:nvPicPr>
+          <p:cNvPr id="6" name="" descr=""/>
+          <p:cNvPicPr>
+            <a:picLocks noGrp="1"/>
+          </p:cNvPicPr>
+          <p:nvPr>
+            <p:ph/>
+          </p:nvPr>
+        </p:nvPicPr>
+        <p:blipFill>
+          <a:blip cstate="print" r:embed="rId3"/>
+          <a:stretch>
+            <a:fillRect/>
+          </a:stretch>
+        </p:blipFill>
+        <p:spPr>
+          <a:xfrm>
+            <a:off x="457200" y="1426464"/>
+            <a:ext cx="4114800" cy="5440680"/>
+          </a:xfrm>
+          <a:prstGeom prst="rect">
+            <a:avLst/>
+          </a:prstGeom>
+        </p:spPr>
+      </p:pic>
+    </p:spTree>
+  </p:cSld>
+  <p:clrMapOvr>
+    <a:masterClrMapping/>
+  </p:clrMapOvr>
+</p:sld>
+</file>
+
+<file path=ppt/slides/slide11.xml><?xml version="1.0" encoding="utf-8"?>
+<p:sld xmlns:a="http://schemas.openxmlformats.org/drawingml/2006/main" xmlns:r="http://schemas.openxmlformats.org/officeDocument/2006/relationships" xmlns:p="http://schemas.openxmlformats.org/presentationml/2006/main">
+  <p:cSld>
+    <p:spTree>
+      <p:nvGrpSpPr>
+        <p:cNvPr id="1" name=""/>
+        <p:cNvGrpSpPr/>
+        <p:nvPr/>
+      </p:nvGrpSpPr>
+      <p:grpSpPr>
+        <a:xfrm>
+          <a:off x="0" y="0"/>
+          <a:ext cx="0" cy="0"/>
+          <a:chOff x="0" y="0"/>
+          <a:chExt cx="0" cy="0"/>
+        </a:xfrm>
+      </p:grpSpPr>
+      <p:sp xmlns:a="http://schemas.openxmlformats.org/drawingml/2006/main" xmlns:r="http://schemas.openxmlformats.org/officeDocument/2006/relationships" xmlns:p="http://schemas.openxmlformats.org/presentationml/2006/main">
+        <p:nvSpPr>
+          <p:cNvPr id="2" name="Title 1"/>
+          <p:cNvSpPr>
+            <a:spLocks noGrp="1"/>
+          </p:cNvSpPr>
+          <p:nvPr>
+            <p:ph type="title"/>
+          </p:nvPr>
+        </p:nvSpPr>
+        <p:spPr>
+          <a:xfrm>
+            <a:off x="457200" y="6283"/>
+            <a:ext cx="8229600" cy="659640"/>
+          </a:xfrm>
+        </p:spPr>
+        <p:txBody>
+          <a:bodyPr/>
+          <a:lstStyle/>
+          <a:p>
+            <a:r>
+              <a:rPr/>
+              <a:t>Comparison MaleMHFD_over_MaleMRD</a:t>
+            </a:r>
+          </a:p>
+        </p:txBody>
+      </p:sp>
+      <p:sp xmlns:a="http://schemas.openxmlformats.org/drawingml/2006/main" xmlns:r="http://schemas.openxmlformats.org/officeDocument/2006/relationships" xmlns:p="http://schemas.openxmlformats.org/presentationml/2006/main">
+        <p:nvSpPr>
+          <p:cNvPr id="3" name="Text Placeholder 4"/>
+          <p:cNvSpPr>
+            <a:spLocks noGrp="1"/>
+          </p:cNvSpPr>
+          <p:nvPr>
+            <p:ph type="body" sz="quarter" idx="3"/>
+          </p:nvPr>
+        </p:nvSpPr>
+        <p:spPr>
+          <a:xfrm>
+            <a:off x="4645025" y="782905"/>
+            <a:ext cx="4041775" cy="639762"/>
+          </a:xfrm>
+        </p:spPr>
+        <p:txBody>
+          <a:bodyPr/>
+          <a:lstStyle/>
+          <a:p>
+            <a:r>
+              <a:rPr/>
+              <a:t>Differential FDR&lt;0.25</a:t>
+            </a:r>
+          </a:p>
+        </p:txBody>
+      </p:sp>
+      <p:sp xmlns:a="http://schemas.openxmlformats.org/drawingml/2006/main" xmlns:r="http://schemas.openxmlformats.org/officeDocument/2006/relationships" xmlns:p="http://schemas.openxmlformats.org/presentationml/2006/main">
+        <p:nvSpPr>
+          <p:cNvPr id="4" name="Text Placeholder 2"/>
+          <p:cNvSpPr>
+            <a:spLocks noGrp="1"/>
+          </p:cNvSpPr>
+          <p:nvPr>
+            <p:ph type="body" idx="1"/>
+          </p:nvPr>
+        </p:nvSpPr>
+        <p:spPr>
+          <a:xfrm>
+            <a:off x="457200" y="776118"/>
+            <a:ext cx="4040188" cy="639762"/>
+          </a:xfrm>
+        </p:spPr>
+        <p:txBody>
+          <a:bodyPr/>
+          <a:lstStyle/>
+          <a:p>
+            <a:r>
+              <a:rPr/>
+              <a:t>Complete Set FDR=1</a:t>
+            </a:r>
+          </a:p>
+        </p:txBody>
+      </p:sp>
+      <p:pic xmlns:a="http://schemas.openxmlformats.org/drawingml/2006/main" xmlns:r="http://schemas.openxmlformats.org/officeDocument/2006/relationships" xmlns:p="http://schemas.openxmlformats.org/presentationml/2006/main">
+        <p:nvPicPr>
+          <p:cNvPr id="5" name="" descr=""/>
+          <p:cNvPicPr>
+            <a:picLocks noGrp="1"/>
+          </p:cNvPicPr>
+          <p:nvPr>
+            <p:ph/>
+          </p:nvPr>
+        </p:nvPicPr>
+        <p:blipFill>
+          <a:blip cstate="print" r:embed="rId2"/>
+          <a:stretch>
+            <a:fillRect/>
+          </a:stretch>
+        </p:blipFill>
+        <p:spPr>
+          <a:xfrm>
+            <a:off x="4645152" y="1426464"/>
+            <a:ext cx="4114800" cy="5440680"/>
+          </a:xfrm>
+          <a:prstGeom prst="rect">
+            <a:avLst/>
+          </a:prstGeom>
+        </p:spPr>
+      </p:pic>
+      <p:pic xmlns:a="http://schemas.openxmlformats.org/drawingml/2006/main" xmlns:r="http://schemas.openxmlformats.org/officeDocument/2006/relationships" xmlns:p="http://schemas.openxmlformats.org/presentationml/2006/main">
+        <p:nvPicPr>
+          <p:cNvPr id="6" name="" descr=""/>
+          <p:cNvPicPr>
+            <a:picLocks noGrp="1"/>
+          </p:cNvPicPr>
+          <p:nvPr>
+            <p:ph/>
+          </p:nvPr>
+        </p:nvPicPr>
+        <p:blipFill>
+          <a:blip cstate="print" r:embed="rId3"/>
+          <a:stretch>
+            <a:fillRect/>
+          </a:stretch>
+        </p:blipFill>
+        <p:spPr>
+          <a:xfrm>
+            <a:off x="457200" y="1426464"/>
+            <a:ext cx="4114800" cy="5440680"/>
+          </a:xfrm>
+          <a:prstGeom prst="rect">
+            <a:avLst/>
+          </a:prstGeom>
+        </p:spPr>
+      </p:pic>
+    </p:spTree>
+  </p:cSld>
+  <p:clrMapOvr>
+    <a:masterClrMapping/>
+  </p:clrMapOvr>
+</p:sld>
+</file>
+
+<file path=ppt/slides/slide12.xml><?xml version="1.0" encoding="utf-8"?>
+<p:sld xmlns:a="http://schemas.openxmlformats.org/drawingml/2006/main" xmlns:r="http://schemas.openxmlformats.org/officeDocument/2006/relationships" xmlns:p="http://schemas.openxmlformats.org/presentationml/2006/main">
+  <p:cSld>
+    <p:spTree>
+      <p:nvGrpSpPr>
+        <p:cNvPr id="1" name=""/>
+        <p:cNvGrpSpPr/>
+        <p:nvPr/>
+      </p:nvGrpSpPr>
+      <p:grpSpPr>
+        <a:xfrm>
+          <a:off x="0" y="0"/>
+          <a:ext cx="0" cy="0"/>
+          <a:chOff x="0" y="0"/>
+          <a:chExt cx="0" cy="0"/>
+        </a:xfrm>
+      </p:grpSpPr>
+      <p:sp xmlns:a="http://schemas.openxmlformats.org/drawingml/2006/main" xmlns:r="http://schemas.openxmlformats.org/officeDocument/2006/relationships" xmlns:p="http://schemas.openxmlformats.org/presentationml/2006/main">
+        <p:nvSpPr>
+          <p:cNvPr id="2" name="Title 1"/>
+          <p:cNvSpPr>
+            <a:spLocks noGrp="1"/>
+          </p:cNvSpPr>
+          <p:nvPr>
+            <p:ph type="title"/>
+          </p:nvPr>
+        </p:nvSpPr>
+        <p:spPr>
+          <a:xfrm>
+            <a:off x="457200" y="6283"/>
+            <a:ext cx="8229600" cy="659640"/>
+          </a:xfrm>
+        </p:spPr>
+        <p:txBody>
+          <a:bodyPr/>
+          <a:lstStyle/>
+          <a:p>
+            <a:r>
+              <a:rPr/>
+              <a:t>Comparison FemMHFD_over_FemMRD</a:t>
+            </a:r>
+          </a:p>
+        </p:txBody>
+      </p:sp>
+      <p:sp xmlns:a="http://schemas.openxmlformats.org/drawingml/2006/main" xmlns:r="http://schemas.openxmlformats.org/officeDocument/2006/relationships" xmlns:p="http://schemas.openxmlformats.org/presentationml/2006/main">
+        <p:nvSpPr>
+          <p:cNvPr id="3" name="Text Placeholder 4"/>
+          <p:cNvSpPr>
+            <a:spLocks noGrp="1"/>
+          </p:cNvSpPr>
+          <p:nvPr>
+            <p:ph type="body" sz="quarter" idx="3"/>
+          </p:nvPr>
+        </p:nvSpPr>
+        <p:spPr>
+          <a:xfrm>
+            <a:off x="4645025" y="782905"/>
+            <a:ext cx="4041775" cy="639762"/>
+          </a:xfrm>
+        </p:spPr>
+        <p:txBody>
+          <a:bodyPr/>
+          <a:lstStyle/>
+          <a:p>
+            <a:r>
+              <a:rPr/>
+              <a:t>Differential FDR&lt;0.25</a:t>
+            </a:r>
+          </a:p>
+        </p:txBody>
+      </p:sp>
+      <p:sp xmlns:a="http://schemas.openxmlformats.org/drawingml/2006/main" xmlns:r="http://schemas.openxmlformats.org/officeDocument/2006/relationships" xmlns:p="http://schemas.openxmlformats.org/presentationml/2006/main">
+        <p:nvSpPr>
+          <p:cNvPr id="4" name="Text Placeholder 2"/>
+          <p:cNvSpPr>
+            <a:spLocks noGrp="1"/>
+          </p:cNvSpPr>
+          <p:nvPr>
+            <p:ph type="body" idx="1"/>
+          </p:nvPr>
+        </p:nvSpPr>
+        <p:spPr>
+          <a:xfrm>
+            <a:off x="457200" y="776118"/>
+            <a:ext cx="4040188" cy="639762"/>
+          </a:xfrm>
+        </p:spPr>
+        <p:txBody>
+          <a:bodyPr/>
+          <a:lstStyle/>
+          <a:p>
+            <a:r>
+              <a:rPr/>
+              <a:t>Complete Set FDR=1</a:t>
+            </a:r>
+          </a:p>
+        </p:txBody>
+      </p:sp>
+      <p:pic xmlns:a="http://schemas.openxmlformats.org/drawingml/2006/main" xmlns:r="http://schemas.openxmlformats.org/officeDocument/2006/relationships" xmlns:p="http://schemas.openxmlformats.org/presentationml/2006/main">
+        <p:nvPicPr>
+          <p:cNvPr id="5" name="" descr=""/>
+          <p:cNvPicPr>
+            <a:picLocks noGrp="1"/>
+          </p:cNvPicPr>
+          <p:nvPr>
+            <p:ph/>
+          </p:nvPr>
+        </p:nvPicPr>
+        <p:blipFill>
+          <a:blip cstate="print" r:embed="rId2"/>
+          <a:stretch>
+            <a:fillRect/>
+          </a:stretch>
+        </p:blipFill>
+        <p:spPr>
+          <a:xfrm>
+            <a:off x="457200" y="1426464"/>
+            <a:ext cx="4114800" cy="5440680"/>
+          </a:xfrm>
+          <a:prstGeom prst="rect">
+            <a:avLst/>
+          </a:prstGeom>
+        </p:spPr>
+      </p:pic>
+    </p:spTree>
+  </p:cSld>
+  <p:clrMapOvr>
+    <a:masterClrMapping/>
+  </p:clrMapOvr>
+</p:sld>
+</file>
+
+<file path=ppt/slides/slide13.xml><?xml version="1.0" encoding="utf-8"?>
+<p:sld xmlns:a="http://schemas.openxmlformats.org/drawingml/2006/main" xmlns:r="http://schemas.openxmlformats.org/officeDocument/2006/relationships" xmlns:p="http://schemas.openxmlformats.org/presentationml/2006/main">
+  <p:cSld>
+    <p:spTree>
+      <p:nvGrpSpPr>
+        <p:cNvPr id="1" name=""/>
+        <p:cNvGrpSpPr/>
+        <p:nvPr/>
+      </p:nvGrpSpPr>
+      <p:grpSpPr>
+        <a:xfrm>
+          <a:off x="0" y="0"/>
+          <a:ext cx="0" cy="0"/>
+          <a:chOff x="0" y="0"/>
+          <a:chExt cx="0" cy="0"/>
+        </a:xfrm>
+      </p:grpSpPr>
+      <p:sp xmlns:a="http://schemas.openxmlformats.org/drawingml/2006/main" xmlns:r="http://schemas.openxmlformats.org/officeDocument/2006/relationships" xmlns:p="http://schemas.openxmlformats.org/presentationml/2006/main">
+        <p:nvSpPr>
+          <p:cNvPr id="2" name="Title 1"/>
+          <p:cNvSpPr>
+            <a:spLocks noGrp="1"/>
+          </p:cNvSpPr>
+          <p:nvPr>
+            <p:ph type="title"/>
+          </p:nvPr>
+        </p:nvSpPr>
+        <p:spPr>
+          <a:xfrm>
+            <a:off x="457200" y="6283"/>
+            <a:ext cx="8229600" cy="659640"/>
+          </a:xfrm>
+        </p:spPr>
+        <p:txBody>
+          <a:bodyPr/>
+          <a:lstStyle/>
+          <a:p>
+            <a:r>
+              <a:rPr/>
+              <a:t>Comparison MaleMRD_MaleMHFD_FemMRD_FemMHFD</a:t>
+            </a:r>
+          </a:p>
+        </p:txBody>
+      </p:sp>
+      <p:sp xmlns:a="http://schemas.openxmlformats.org/drawingml/2006/main" xmlns:r="http://schemas.openxmlformats.org/officeDocument/2006/relationships" xmlns:p="http://schemas.openxmlformats.org/presentationml/2006/main">
+        <p:nvSpPr>
+          <p:cNvPr id="3" name="Text Placeholder 4"/>
+          <p:cNvSpPr>
+            <a:spLocks noGrp="1"/>
+          </p:cNvSpPr>
+          <p:nvPr>
+            <p:ph type="body" sz="quarter" idx="3"/>
+          </p:nvPr>
+        </p:nvSpPr>
+        <p:spPr>
+          <a:xfrm>
+            <a:off x="4645025" y="782905"/>
+            <a:ext cx="4041775" cy="639762"/>
+          </a:xfrm>
+        </p:spPr>
+        <p:txBody>
+          <a:bodyPr/>
+          <a:lstStyle/>
+          <a:p>
+            <a:r>
+              <a:rPr/>
+              <a:t>Differential FDR&lt;0.25</a:t>
+            </a:r>
+          </a:p>
+        </p:txBody>
+      </p:sp>
+      <p:sp xmlns:a="http://schemas.openxmlformats.org/drawingml/2006/main" xmlns:r="http://schemas.openxmlformats.org/officeDocument/2006/relationships" xmlns:p="http://schemas.openxmlformats.org/presentationml/2006/main">
+        <p:nvSpPr>
+          <p:cNvPr id="4" name="Text Placeholder 2"/>
+          <p:cNvSpPr>
+            <a:spLocks noGrp="1"/>
+          </p:cNvSpPr>
+          <p:nvPr>
+            <p:ph type="body" idx="1"/>
+          </p:nvPr>
+        </p:nvSpPr>
+        <p:spPr>
+          <a:xfrm>
+            <a:off x="457200" y="776118"/>
+            <a:ext cx="4040188" cy="639762"/>
+          </a:xfrm>
+        </p:spPr>
+        <p:txBody>
+          <a:bodyPr/>
+          <a:lstStyle/>
+          <a:p>
+            <a:r>
+              <a:rPr/>
+              <a:t>Complete Set FDR=1</a:t>
+            </a:r>
+          </a:p>
+        </p:txBody>
+      </p:sp>
+      <p:pic xmlns:a="http://schemas.openxmlformats.org/drawingml/2006/main" xmlns:r="http://schemas.openxmlformats.org/officeDocument/2006/relationships" xmlns:p="http://schemas.openxmlformats.org/presentationml/2006/main">
+        <p:nvPicPr>
+          <p:cNvPr id="5" name="" descr=""/>
+          <p:cNvPicPr>
+            <a:picLocks noGrp="1"/>
+          </p:cNvPicPr>
+          <p:nvPr>
+            <p:ph/>
+          </p:nvPr>
+        </p:nvPicPr>
+        <p:blipFill>
+          <a:blip cstate="print" r:embed="rId2"/>
+          <a:stretch>
+            <a:fillRect/>
+          </a:stretch>
+        </p:blipFill>
+        <p:spPr>
+          <a:xfrm>
+            <a:off x="4645152" y="1426464"/>
+            <a:ext cx="4114800" cy="5440680"/>
+          </a:xfrm>
+          <a:prstGeom prst="rect">
+            <a:avLst/>
+          </a:prstGeom>
+        </p:spPr>
+      </p:pic>
+      <p:pic xmlns:a="http://schemas.openxmlformats.org/drawingml/2006/main" xmlns:r="http://schemas.openxmlformats.org/officeDocument/2006/relationships" xmlns:p="http://schemas.openxmlformats.org/presentationml/2006/main">
+        <p:nvPicPr>
+          <p:cNvPr id="6" name="" descr=""/>
+          <p:cNvPicPr>
+            <a:picLocks noGrp="1"/>
+          </p:cNvPicPr>
+          <p:nvPr>
+            <p:ph/>
+          </p:nvPr>
+        </p:nvPicPr>
+        <p:blipFill>
+          <a:blip cstate="print" r:embed="rId3"/>
+          <a:stretch>
+            <a:fillRect/>
+          </a:stretch>
+        </p:blipFill>
+        <p:spPr>
+          <a:xfrm>
+            <a:off x="457200" y="1426464"/>
+            <a:ext cx="4114800" cy="5440680"/>
+          </a:xfrm>
+          <a:prstGeom prst="rect">
+            <a:avLst/>
+          </a:prstGeom>
+        </p:spPr>
+      </p:pic>
     </p:spTree>
   </p:cSld>
   <p:clrMapOvr>
@@ -1869,7 +2479,7 @@
           <a:chExt cx="0" cy="0"/>
         </a:xfrm>
       </p:grpSpPr>
-      <p:sp>
+      <p:sp xmlns:a="http://schemas.openxmlformats.org/drawingml/2006/main" xmlns:r="http://schemas.openxmlformats.org/officeDocument/2006/relationships" xmlns:p="http://schemas.openxmlformats.org/presentationml/2006/main">
         <p:nvSpPr>
           <p:cNvPr id="2" name="Title 1"/>
           <p:cNvSpPr>
@@ -1896,7 +2506,7 @@
           </a:p>
         </p:txBody>
       </p:sp>
-      <p:sp>
+      <p:sp xmlns:a="http://schemas.openxmlformats.org/drawingml/2006/main" xmlns:r="http://schemas.openxmlformats.org/officeDocument/2006/relationships" xmlns:p="http://schemas.openxmlformats.org/presentationml/2006/main">
         <p:nvSpPr>
           <p:cNvPr id="3" name="Content Placeholder 2"/>
           <p:cNvSpPr>
@@ -2019,7 +2629,7 @@
           <a:chExt cx="0" cy="0"/>
         </a:xfrm>
       </p:grpSpPr>
-      <p:sp>
+      <p:sp xmlns:a="http://schemas.openxmlformats.org/drawingml/2006/main" xmlns:r="http://schemas.openxmlformats.org/officeDocument/2006/relationships" xmlns:p="http://schemas.openxmlformats.org/presentationml/2006/main">
         <p:nvSpPr>
           <p:cNvPr id="2" name="Title 1"/>
           <p:cNvSpPr>
@@ -2046,7 +2656,7 @@
           </a:p>
         </p:txBody>
       </p:sp>
-      <p:pic>
+      <p:pic xmlns:a="http://schemas.openxmlformats.org/drawingml/2006/main" xmlns:r="http://schemas.openxmlformats.org/officeDocument/2006/relationships" xmlns:p="http://schemas.openxmlformats.org/presentationml/2006/main">
         <p:nvPicPr>
           <p:cNvPr id="3" name="" descr=""/>
           <p:cNvPicPr>
@@ -2097,7 +2707,7 @@
           <a:chExt cx="0" cy="0"/>
         </a:xfrm>
       </p:grpSpPr>
-      <p:sp>
+      <p:sp xmlns:a="http://schemas.openxmlformats.org/drawingml/2006/main" xmlns:r="http://schemas.openxmlformats.org/officeDocument/2006/relationships" xmlns:p="http://schemas.openxmlformats.org/presentationml/2006/main">
         <p:nvSpPr>
           <p:cNvPr id="2" name="Title 1"/>
           <p:cNvSpPr>
@@ -2124,7 +2734,7 @@
           </a:p>
         </p:txBody>
       </p:sp>
-      <p:pic>
+      <p:pic xmlns:a="http://schemas.openxmlformats.org/drawingml/2006/main" xmlns:r="http://schemas.openxmlformats.org/officeDocument/2006/relationships" xmlns:p="http://schemas.openxmlformats.org/presentationml/2006/main">
         <p:nvPicPr>
           <p:cNvPr id="3" name="" descr=""/>
           <p:cNvPicPr>
@@ -2175,7 +2785,7 @@
           <a:chExt cx="0" cy="0"/>
         </a:xfrm>
       </p:grpSpPr>
-      <p:sp>
+      <p:sp xmlns:a="http://schemas.openxmlformats.org/drawingml/2006/main" xmlns:r="http://schemas.openxmlformats.org/officeDocument/2006/relationships" xmlns:p="http://schemas.openxmlformats.org/presentationml/2006/main">
         <p:nvSpPr>
           <p:cNvPr id="2" name="Title 1"/>
           <p:cNvSpPr>
@@ -2202,7 +2812,7 @@
           </a:p>
         </p:txBody>
       </p:sp>
-      <p:pic>
+      <p:pic xmlns:a="http://schemas.openxmlformats.org/drawingml/2006/main" xmlns:r="http://schemas.openxmlformats.org/officeDocument/2006/relationships" xmlns:p="http://schemas.openxmlformats.org/presentationml/2006/main">
         <p:nvPicPr>
           <p:cNvPr id="3" name="" descr=""/>
           <p:cNvPicPr>
@@ -2253,7 +2863,7 @@
           <a:chExt cx="0" cy="0"/>
         </a:xfrm>
       </p:grpSpPr>
-      <p:sp>
+      <p:sp xmlns:a="http://schemas.openxmlformats.org/drawingml/2006/main" xmlns:r="http://schemas.openxmlformats.org/officeDocument/2006/relationships" xmlns:p="http://schemas.openxmlformats.org/presentationml/2006/main">
         <p:nvSpPr>
           <p:cNvPr id="2" name="Title 1"/>
           <p:cNvSpPr>
@@ -2280,7 +2890,7 @@
           </a:p>
         </p:txBody>
       </p:sp>
-      <p:sp>
+      <p:sp xmlns:a="http://schemas.openxmlformats.org/drawingml/2006/main" xmlns:r="http://schemas.openxmlformats.org/officeDocument/2006/relationships" xmlns:p="http://schemas.openxmlformats.org/presentationml/2006/main">
         <p:nvSpPr>
           <p:cNvPr id="3" name="Text Placeholder 4"/>
           <p:cNvSpPr>
@@ -2302,12 +2912,12 @@
           <a:p>
             <a:r>
               <a:rPr/>
-              <a:t>Differential FDR&lt;0.25</a:t>
-            </a:r>
-          </a:p>
-        </p:txBody>
-      </p:sp>
-      <p:sp>
+              <a:t>Normalized PCA</a:t>
+            </a:r>
+          </a:p>
+        </p:txBody>
+      </p:sp>
+      <p:sp xmlns:a="http://schemas.openxmlformats.org/drawingml/2006/main" xmlns:r="http://schemas.openxmlformats.org/officeDocument/2006/relationships" xmlns:p="http://schemas.openxmlformats.org/presentationml/2006/main">
         <p:nvSpPr>
           <p:cNvPr id="4" name="Text Placeholder 2"/>
           <p:cNvSpPr>
@@ -2329,12 +2939,12 @@
           <a:p>
             <a:r>
               <a:rPr/>
-              <a:t>Complete Set FDR=1</a:t>
-            </a:r>
-          </a:p>
-        </p:txBody>
-      </p:sp>
-      <p:pic>
+              <a:t>Raw PCA</a:t>
+            </a:r>
+          </a:p>
+        </p:txBody>
+      </p:sp>
+      <p:pic xmlns:a="http://schemas.openxmlformats.org/drawingml/2006/main" xmlns:r="http://schemas.openxmlformats.org/officeDocument/2006/relationships" xmlns:p="http://schemas.openxmlformats.org/presentationml/2006/main">
         <p:nvPicPr>
           <p:cNvPr id="5" name="" descr=""/>
           <p:cNvPicPr>
@@ -2353,14 +2963,14 @@
         <p:spPr>
           <a:xfrm>
             <a:off x="4645152" y="1426464"/>
-            <a:ext cx="4114800" cy="5440680"/>
+            <a:ext cx="4114800" cy="3886200"/>
           </a:xfrm>
           <a:prstGeom prst="rect">
             <a:avLst/>
           </a:prstGeom>
         </p:spPr>
       </p:pic>
-      <p:pic>
+      <p:pic xmlns:a="http://schemas.openxmlformats.org/drawingml/2006/main" xmlns:r="http://schemas.openxmlformats.org/officeDocument/2006/relationships" xmlns:p="http://schemas.openxmlformats.org/presentationml/2006/main">
         <p:nvPicPr>
           <p:cNvPr id="6" name="" descr=""/>
           <p:cNvPicPr>
@@ -2379,7 +2989,7 @@
         <p:spPr>
           <a:xfrm>
             <a:off x="457200" y="1426464"/>
-            <a:ext cx="4114800" cy="5440680"/>
+            <a:ext cx="4114800" cy="3886200"/>
           </a:xfrm>
           <a:prstGeom prst="rect">
             <a:avLst/>
@@ -2411,7 +3021,7 @@
           <a:chExt cx="0" cy="0"/>
         </a:xfrm>
       </p:grpSpPr>
-      <p:sp>
+      <p:sp xmlns:a="http://schemas.openxmlformats.org/drawingml/2006/main" xmlns:r="http://schemas.openxmlformats.org/officeDocument/2006/relationships" xmlns:p="http://schemas.openxmlformats.org/presentationml/2006/main">
         <p:nvSpPr>
           <p:cNvPr id="2" name="Title 1"/>
           <p:cNvSpPr>
@@ -2438,7 +3048,7 @@
           </a:p>
         </p:txBody>
       </p:sp>
-      <p:sp>
+      <p:sp xmlns:a="http://schemas.openxmlformats.org/drawingml/2006/main" xmlns:r="http://schemas.openxmlformats.org/officeDocument/2006/relationships" xmlns:p="http://schemas.openxmlformats.org/presentationml/2006/main">
         <p:nvSpPr>
           <p:cNvPr id="3" name="Text Placeholder 4"/>
           <p:cNvSpPr>
@@ -2460,12 +3070,12 @@
           <a:p>
             <a:r>
               <a:rPr/>
-              <a:t>Differential FDR&lt;0.25</a:t>
-            </a:r>
-          </a:p>
-        </p:txBody>
-      </p:sp>
-      <p:sp>
+              <a:t>Normalized PCA</a:t>
+            </a:r>
+          </a:p>
+        </p:txBody>
+      </p:sp>
+      <p:sp xmlns:a="http://schemas.openxmlformats.org/drawingml/2006/main" xmlns:r="http://schemas.openxmlformats.org/officeDocument/2006/relationships" xmlns:p="http://schemas.openxmlformats.org/presentationml/2006/main">
         <p:nvSpPr>
           <p:cNvPr id="4" name="Text Placeholder 2"/>
           <p:cNvSpPr>
@@ -2487,12 +3097,12 @@
           <a:p>
             <a:r>
               <a:rPr/>
-              <a:t>Complete Set FDR=1</a:t>
-            </a:r>
-          </a:p>
-        </p:txBody>
-      </p:sp>
-      <p:pic>
+              <a:t>Raw PCA</a:t>
+            </a:r>
+          </a:p>
+        </p:txBody>
+      </p:sp>
+      <p:pic xmlns:a="http://schemas.openxmlformats.org/drawingml/2006/main" xmlns:r="http://schemas.openxmlformats.org/officeDocument/2006/relationships" xmlns:p="http://schemas.openxmlformats.org/presentationml/2006/main">
         <p:nvPicPr>
           <p:cNvPr id="5" name="" descr=""/>
           <p:cNvPicPr>
@@ -2511,14 +3121,14 @@
         <p:spPr>
           <a:xfrm>
             <a:off x="4645152" y="1426464"/>
-            <a:ext cx="4114800" cy="5440680"/>
+            <a:ext cx="4114800" cy="3886200"/>
           </a:xfrm>
           <a:prstGeom prst="rect">
             <a:avLst/>
           </a:prstGeom>
         </p:spPr>
       </p:pic>
-      <p:pic>
+      <p:pic xmlns:a="http://schemas.openxmlformats.org/drawingml/2006/main" xmlns:r="http://schemas.openxmlformats.org/officeDocument/2006/relationships" xmlns:p="http://schemas.openxmlformats.org/presentationml/2006/main">
         <p:nvPicPr>
           <p:cNvPr id="6" name="" descr=""/>
           <p:cNvPicPr>
@@ -2537,7 +3147,7 @@
         <p:spPr>
           <a:xfrm>
             <a:off x="457200" y="1426464"/>
-            <a:ext cx="4114800" cy="5440680"/>
+            <a:ext cx="4114800" cy="3886200"/>
           </a:xfrm>
           <a:prstGeom prst="rect">
             <a:avLst/>
@@ -2569,7 +3179,7 @@
           <a:chExt cx="0" cy="0"/>
         </a:xfrm>
       </p:grpSpPr>
-      <p:sp>
+      <p:sp xmlns:a="http://schemas.openxmlformats.org/drawingml/2006/main" xmlns:r="http://schemas.openxmlformats.org/officeDocument/2006/relationships" xmlns:p="http://schemas.openxmlformats.org/presentationml/2006/main">
         <p:nvSpPr>
           <p:cNvPr id="2" name="Title 1"/>
           <p:cNvSpPr>
@@ -2596,7 +3206,7 @@
           </a:p>
         </p:txBody>
       </p:sp>
-      <p:sp>
+      <p:sp xmlns:a="http://schemas.openxmlformats.org/drawingml/2006/main" xmlns:r="http://schemas.openxmlformats.org/officeDocument/2006/relationships" xmlns:p="http://schemas.openxmlformats.org/presentationml/2006/main">
         <p:nvSpPr>
           <p:cNvPr id="3" name="Text Placeholder 4"/>
           <p:cNvSpPr>
@@ -2618,12 +3228,12 @@
           <a:p>
             <a:r>
               <a:rPr/>
-              <a:t>Differential FDR&lt;0.25</a:t>
-            </a:r>
-          </a:p>
-        </p:txBody>
-      </p:sp>
-      <p:sp>
+              <a:t>Normalized PCA</a:t>
+            </a:r>
+          </a:p>
+        </p:txBody>
+      </p:sp>
+      <p:sp xmlns:a="http://schemas.openxmlformats.org/drawingml/2006/main" xmlns:r="http://schemas.openxmlformats.org/officeDocument/2006/relationships" xmlns:p="http://schemas.openxmlformats.org/presentationml/2006/main">
         <p:nvSpPr>
           <p:cNvPr id="4" name="Text Placeholder 2"/>
           <p:cNvSpPr>
@@ -2645,12 +3255,12 @@
           <a:p>
             <a:r>
               <a:rPr/>
-              <a:t>Complete Set FDR=1</a:t>
-            </a:r>
-          </a:p>
-        </p:txBody>
-      </p:sp>
-      <p:pic>
+              <a:t>Raw PCA</a:t>
+            </a:r>
+          </a:p>
+        </p:txBody>
+      </p:sp>
+      <p:pic xmlns:a="http://schemas.openxmlformats.org/drawingml/2006/main" xmlns:r="http://schemas.openxmlformats.org/officeDocument/2006/relationships" xmlns:p="http://schemas.openxmlformats.org/presentationml/2006/main">
         <p:nvPicPr>
           <p:cNvPr id="5" name="" descr=""/>
           <p:cNvPicPr>
@@ -2668,8 +3278,34 @@
         </p:blipFill>
         <p:spPr>
           <a:xfrm>
+            <a:off x="4645152" y="1426464"/>
+            <a:ext cx="4114800" cy="3886200"/>
+          </a:xfrm>
+          <a:prstGeom prst="rect">
+            <a:avLst/>
+          </a:prstGeom>
+        </p:spPr>
+      </p:pic>
+      <p:pic xmlns:a="http://schemas.openxmlformats.org/drawingml/2006/main" xmlns:r="http://schemas.openxmlformats.org/officeDocument/2006/relationships" xmlns:p="http://schemas.openxmlformats.org/presentationml/2006/main">
+        <p:nvPicPr>
+          <p:cNvPr id="6" name="" descr=""/>
+          <p:cNvPicPr>
+            <a:picLocks noGrp="1"/>
+          </p:cNvPicPr>
+          <p:nvPr>
+            <p:ph/>
+          </p:nvPr>
+        </p:nvPicPr>
+        <p:blipFill>
+          <a:blip cstate="print" r:embed="rId3"/>
+          <a:stretch>
+            <a:fillRect/>
+          </a:stretch>
+        </p:blipFill>
+        <p:spPr>
+          <a:xfrm>
             <a:off x="457200" y="1426464"/>
-            <a:ext cx="4114800" cy="5440680"/>
+            <a:ext cx="4114800" cy="3886200"/>
           </a:xfrm>
           <a:prstGeom prst="rect">
             <a:avLst/>
@@ -2701,7 +3337,7 @@
           <a:chExt cx="0" cy="0"/>
         </a:xfrm>
       </p:grpSpPr>
-      <p:sp>
+      <p:sp xmlns:a="http://schemas.openxmlformats.org/drawingml/2006/main" xmlns:r="http://schemas.openxmlformats.org/officeDocument/2006/relationships" xmlns:p="http://schemas.openxmlformats.org/presentationml/2006/main">
         <p:nvSpPr>
           <p:cNvPr id="2" name="Title 1"/>
           <p:cNvSpPr>
@@ -2728,7 +3364,7 @@
           </a:p>
         </p:txBody>
       </p:sp>
-      <p:sp>
+      <p:sp xmlns:a="http://schemas.openxmlformats.org/drawingml/2006/main" xmlns:r="http://schemas.openxmlformats.org/officeDocument/2006/relationships" xmlns:p="http://schemas.openxmlformats.org/presentationml/2006/main">
         <p:nvSpPr>
           <p:cNvPr id="3" name="Text Placeholder 4"/>
           <p:cNvSpPr>
@@ -2750,12 +3386,12 @@
           <a:p>
             <a:r>
               <a:rPr/>
-              <a:t>Differential FDR&lt;0.25</a:t>
-            </a:r>
-          </a:p>
-        </p:txBody>
-      </p:sp>
-      <p:sp>
+              <a:t>Normalized PCA</a:t>
+            </a:r>
+          </a:p>
+        </p:txBody>
+      </p:sp>
+      <p:sp xmlns:a="http://schemas.openxmlformats.org/drawingml/2006/main" xmlns:r="http://schemas.openxmlformats.org/officeDocument/2006/relationships" xmlns:p="http://schemas.openxmlformats.org/presentationml/2006/main">
         <p:nvSpPr>
           <p:cNvPr id="4" name="Text Placeholder 2"/>
           <p:cNvSpPr>
@@ -2777,12 +3413,12 @@
           <a:p>
             <a:r>
               <a:rPr/>
-              <a:t>Complete Set FDR=1</a:t>
-            </a:r>
-          </a:p>
-        </p:txBody>
-      </p:sp>
-      <p:pic>
+              <a:t>Raw PCA</a:t>
+            </a:r>
+          </a:p>
+        </p:txBody>
+      </p:sp>
+      <p:pic xmlns:a="http://schemas.openxmlformats.org/drawingml/2006/main" xmlns:r="http://schemas.openxmlformats.org/officeDocument/2006/relationships" xmlns:p="http://schemas.openxmlformats.org/presentationml/2006/main">
         <p:nvPicPr>
           <p:cNvPr id="5" name="" descr=""/>
           <p:cNvPicPr>
@@ -2801,14 +3437,14 @@
         <p:spPr>
           <a:xfrm>
             <a:off x="4645152" y="1426464"/>
-            <a:ext cx="4114800" cy="5440680"/>
+            <a:ext cx="4114800" cy="3886200"/>
           </a:xfrm>
           <a:prstGeom prst="rect">
             <a:avLst/>
           </a:prstGeom>
         </p:spPr>
       </p:pic>
-      <p:pic>
+      <p:pic xmlns:a="http://schemas.openxmlformats.org/drawingml/2006/main" xmlns:r="http://schemas.openxmlformats.org/officeDocument/2006/relationships" xmlns:p="http://schemas.openxmlformats.org/presentationml/2006/main">
         <p:nvPicPr>
           <p:cNvPr id="6" name="" descr=""/>
           <p:cNvPicPr>
@@ -2827,7 +3463,7 @@
         <p:spPr>
           <a:xfrm>
             <a:off x="457200" y="1426464"/>
-            <a:ext cx="4114800" cy="5440680"/>
+            <a:ext cx="4114800" cy="3886200"/>
           </a:xfrm>
           <a:prstGeom prst="rect">
             <a:avLst/>

--- a/example3-iqr/results/report.pptx
+++ b/example3-iqr/results/report.pptx
@@ -10,7 +10,7 @@
   <p:handoutMasterIdLst>
     <p:handoutMasterId r:id="rId3"/>
   </p:handoutMasterIdLst>
-  <p:sldIdLst xmlns:a="http://schemas.openxmlformats.org/drawingml/2006/main" xmlns:r="http://schemas.openxmlformats.org/officeDocument/2006/relationships" xmlns:p="http://schemas.openxmlformats.org/presentationml/2006/main">
+  <p:sldIdLst>
     <p:sldId id="256" r:id="rId8"/>
     <p:sldId id="257" r:id="rId9"/>
     <p:sldId id="258" r:id="rId10"/>
@@ -1794,7 +1794,7 @@
           <a:chExt cx="0" cy="0"/>
         </a:xfrm>
       </p:grpSpPr>
-      <p:sp xmlns:a="http://schemas.openxmlformats.org/drawingml/2006/main" xmlns:r="http://schemas.openxmlformats.org/officeDocument/2006/relationships" xmlns:p="http://schemas.openxmlformats.org/presentationml/2006/main">
+      <p:sp>
         <p:nvSpPr>
           <p:cNvPr id="2" name="Title 1"/>
           <p:cNvSpPr>
@@ -1821,7 +1821,7 @@
           </a:p>
         </p:txBody>
       </p:sp>
-      <p:sp xmlns:a="http://schemas.openxmlformats.org/drawingml/2006/main" xmlns:r="http://schemas.openxmlformats.org/officeDocument/2006/relationships" xmlns:p="http://schemas.openxmlformats.org/presentationml/2006/main">
+      <p:sp>
         <p:nvSpPr>
           <p:cNvPr id="3" name="Subtitle 2"/>
           <p:cNvSpPr>
@@ -1873,7 +1873,7 @@
           <a:chExt cx="0" cy="0"/>
         </a:xfrm>
       </p:grpSpPr>
-      <p:sp xmlns:a="http://schemas.openxmlformats.org/drawingml/2006/main" xmlns:r="http://schemas.openxmlformats.org/officeDocument/2006/relationships" xmlns:p="http://schemas.openxmlformats.org/presentationml/2006/main">
+      <p:sp>
         <p:nvSpPr>
           <p:cNvPr id="2" name="Title 1"/>
           <p:cNvSpPr>
@@ -1900,7 +1900,7 @@
           </a:p>
         </p:txBody>
       </p:sp>
-      <p:sp xmlns:a="http://schemas.openxmlformats.org/drawingml/2006/main" xmlns:r="http://schemas.openxmlformats.org/officeDocument/2006/relationships" xmlns:p="http://schemas.openxmlformats.org/presentationml/2006/main">
+      <p:sp>
         <p:nvSpPr>
           <p:cNvPr id="3" name="Text Placeholder 4"/>
           <p:cNvSpPr>
@@ -1922,12 +1922,12 @@
           <a:p>
             <a:r>
               <a:rPr/>
-              <a:t>Differential FDR&lt;0.25</a:t>
-            </a:r>
-          </a:p>
-        </p:txBody>
-      </p:sp>
-      <p:sp xmlns:a="http://schemas.openxmlformats.org/drawingml/2006/main" xmlns:r="http://schemas.openxmlformats.org/officeDocument/2006/relationships" xmlns:p="http://schemas.openxmlformats.org/presentationml/2006/main">
+              <a:t>Differential fdr&lt;0.25</a:t>
+            </a:r>
+          </a:p>
+        </p:txBody>
+      </p:sp>
+      <p:sp>
         <p:nvSpPr>
           <p:cNvPr id="4" name="Text Placeholder 2"/>
           <p:cNvSpPr>
@@ -1949,12 +1949,12 @@
           <a:p>
             <a:r>
               <a:rPr/>
-              <a:t>Complete Set FDR=1</a:t>
-            </a:r>
-          </a:p>
-        </p:txBody>
-      </p:sp>
-      <p:pic xmlns:a="http://schemas.openxmlformats.org/drawingml/2006/main" xmlns:r="http://schemas.openxmlformats.org/officeDocument/2006/relationships" xmlns:p="http://schemas.openxmlformats.org/presentationml/2006/main">
+              <a:t>Complete Set fdr=1</a:t>
+            </a:r>
+          </a:p>
+        </p:txBody>
+      </p:sp>
+      <p:pic>
         <p:nvPicPr>
           <p:cNvPr id="5" name="" descr=""/>
           <p:cNvPicPr>
@@ -1980,7 +1980,7 @@
           </a:prstGeom>
         </p:spPr>
       </p:pic>
-      <p:pic xmlns:a="http://schemas.openxmlformats.org/drawingml/2006/main" xmlns:r="http://schemas.openxmlformats.org/officeDocument/2006/relationships" xmlns:p="http://schemas.openxmlformats.org/presentationml/2006/main">
+      <p:pic>
         <p:nvPicPr>
           <p:cNvPr id="6" name="" descr=""/>
           <p:cNvPicPr>
@@ -2031,7 +2031,7 @@
           <a:chExt cx="0" cy="0"/>
         </a:xfrm>
       </p:grpSpPr>
-      <p:sp xmlns:a="http://schemas.openxmlformats.org/drawingml/2006/main" xmlns:r="http://schemas.openxmlformats.org/officeDocument/2006/relationships" xmlns:p="http://schemas.openxmlformats.org/presentationml/2006/main">
+      <p:sp>
         <p:nvSpPr>
           <p:cNvPr id="2" name="Title 1"/>
           <p:cNvSpPr>
@@ -2058,7 +2058,7 @@
           </a:p>
         </p:txBody>
       </p:sp>
-      <p:sp xmlns:a="http://schemas.openxmlformats.org/drawingml/2006/main" xmlns:r="http://schemas.openxmlformats.org/officeDocument/2006/relationships" xmlns:p="http://schemas.openxmlformats.org/presentationml/2006/main">
+      <p:sp>
         <p:nvSpPr>
           <p:cNvPr id="3" name="Text Placeholder 4"/>
           <p:cNvSpPr>
@@ -2080,12 +2080,12 @@
           <a:p>
             <a:r>
               <a:rPr/>
-              <a:t>Differential FDR&lt;0.25</a:t>
-            </a:r>
-          </a:p>
-        </p:txBody>
-      </p:sp>
-      <p:sp xmlns:a="http://schemas.openxmlformats.org/drawingml/2006/main" xmlns:r="http://schemas.openxmlformats.org/officeDocument/2006/relationships" xmlns:p="http://schemas.openxmlformats.org/presentationml/2006/main">
+              <a:t>Differential fdr&lt;0.25</a:t>
+            </a:r>
+          </a:p>
+        </p:txBody>
+      </p:sp>
+      <p:sp>
         <p:nvSpPr>
           <p:cNvPr id="4" name="Text Placeholder 2"/>
           <p:cNvSpPr>
@@ -2107,12 +2107,12 @@
           <a:p>
             <a:r>
               <a:rPr/>
-              <a:t>Complete Set FDR=1</a:t>
-            </a:r>
-          </a:p>
-        </p:txBody>
-      </p:sp>
-      <p:pic xmlns:a="http://schemas.openxmlformats.org/drawingml/2006/main" xmlns:r="http://schemas.openxmlformats.org/officeDocument/2006/relationships" xmlns:p="http://schemas.openxmlformats.org/presentationml/2006/main">
+              <a:t>Complete Set fdr=1</a:t>
+            </a:r>
+          </a:p>
+        </p:txBody>
+      </p:sp>
+      <p:pic>
         <p:nvPicPr>
           <p:cNvPr id="5" name="" descr=""/>
           <p:cNvPicPr>
@@ -2138,7 +2138,7 @@
           </a:prstGeom>
         </p:spPr>
       </p:pic>
-      <p:pic xmlns:a="http://schemas.openxmlformats.org/drawingml/2006/main" xmlns:r="http://schemas.openxmlformats.org/officeDocument/2006/relationships" xmlns:p="http://schemas.openxmlformats.org/presentationml/2006/main">
+      <p:pic>
         <p:nvPicPr>
           <p:cNvPr id="6" name="" descr=""/>
           <p:cNvPicPr>
@@ -2189,7 +2189,7 @@
           <a:chExt cx="0" cy="0"/>
         </a:xfrm>
       </p:grpSpPr>
-      <p:sp xmlns:a="http://schemas.openxmlformats.org/drawingml/2006/main" xmlns:r="http://schemas.openxmlformats.org/officeDocument/2006/relationships" xmlns:p="http://schemas.openxmlformats.org/presentationml/2006/main">
+      <p:sp>
         <p:nvSpPr>
           <p:cNvPr id="2" name="Title 1"/>
           <p:cNvSpPr>
@@ -2216,7 +2216,7 @@
           </a:p>
         </p:txBody>
       </p:sp>
-      <p:sp xmlns:a="http://schemas.openxmlformats.org/drawingml/2006/main" xmlns:r="http://schemas.openxmlformats.org/officeDocument/2006/relationships" xmlns:p="http://schemas.openxmlformats.org/presentationml/2006/main">
+      <p:sp>
         <p:nvSpPr>
           <p:cNvPr id="3" name="Text Placeholder 4"/>
           <p:cNvSpPr>
@@ -2238,12 +2238,12 @@
           <a:p>
             <a:r>
               <a:rPr/>
-              <a:t>Differential FDR&lt;0.25</a:t>
-            </a:r>
-          </a:p>
-        </p:txBody>
-      </p:sp>
-      <p:sp xmlns:a="http://schemas.openxmlformats.org/drawingml/2006/main" xmlns:r="http://schemas.openxmlformats.org/officeDocument/2006/relationships" xmlns:p="http://schemas.openxmlformats.org/presentationml/2006/main">
+              <a:t>Differential fdr&lt;0.25</a:t>
+            </a:r>
+          </a:p>
+        </p:txBody>
+      </p:sp>
+      <p:sp>
         <p:nvSpPr>
           <p:cNvPr id="4" name="Text Placeholder 2"/>
           <p:cNvSpPr>
@@ -2265,12 +2265,12 @@
           <a:p>
             <a:r>
               <a:rPr/>
-              <a:t>Complete Set FDR=1</a:t>
-            </a:r>
-          </a:p>
-        </p:txBody>
-      </p:sp>
-      <p:pic xmlns:a="http://schemas.openxmlformats.org/drawingml/2006/main" xmlns:r="http://schemas.openxmlformats.org/officeDocument/2006/relationships" xmlns:p="http://schemas.openxmlformats.org/presentationml/2006/main">
+              <a:t>Complete Set fdr=1</a:t>
+            </a:r>
+          </a:p>
+        </p:txBody>
+      </p:sp>
+      <p:pic>
         <p:nvPicPr>
           <p:cNvPr id="5" name="" descr=""/>
           <p:cNvPicPr>
@@ -2321,7 +2321,7 @@
           <a:chExt cx="0" cy="0"/>
         </a:xfrm>
       </p:grpSpPr>
-      <p:sp xmlns:a="http://schemas.openxmlformats.org/drawingml/2006/main" xmlns:r="http://schemas.openxmlformats.org/officeDocument/2006/relationships" xmlns:p="http://schemas.openxmlformats.org/presentationml/2006/main">
+      <p:sp>
         <p:nvSpPr>
           <p:cNvPr id="2" name="Title 1"/>
           <p:cNvSpPr>
@@ -2348,7 +2348,7 @@
           </a:p>
         </p:txBody>
       </p:sp>
-      <p:sp xmlns:a="http://schemas.openxmlformats.org/drawingml/2006/main" xmlns:r="http://schemas.openxmlformats.org/officeDocument/2006/relationships" xmlns:p="http://schemas.openxmlformats.org/presentationml/2006/main">
+      <p:sp>
         <p:nvSpPr>
           <p:cNvPr id="3" name="Text Placeholder 4"/>
           <p:cNvSpPr>
@@ -2370,12 +2370,12 @@
           <a:p>
             <a:r>
               <a:rPr/>
-              <a:t>Differential FDR&lt;0.25</a:t>
-            </a:r>
-          </a:p>
-        </p:txBody>
-      </p:sp>
-      <p:sp xmlns:a="http://schemas.openxmlformats.org/drawingml/2006/main" xmlns:r="http://schemas.openxmlformats.org/officeDocument/2006/relationships" xmlns:p="http://schemas.openxmlformats.org/presentationml/2006/main">
+              <a:t>Differential fdr&lt;0.25</a:t>
+            </a:r>
+          </a:p>
+        </p:txBody>
+      </p:sp>
+      <p:sp>
         <p:nvSpPr>
           <p:cNvPr id="4" name="Text Placeholder 2"/>
           <p:cNvSpPr>
@@ -2397,12 +2397,12 @@
           <a:p>
             <a:r>
               <a:rPr/>
-              <a:t>Complete Set FDR=1</a:t>
-            </a:r>
-          </a:p>
-        </p:txBody>
-      </p:sp>
-      <p:pic xmlns:a="http://schemas.openxmlformats.org/drawingml/2006/main" xmlns:r="http://schemas.openxmlformats.org/officeDocument/2006/relationships" xmlns:p="http://schemas.openxmlformats.org/presentationml/2006/main">
+              <a:t>Complete Set fdr=1</a:t>
+            </a:r>
+          </a:p>
+        </p:txBody>
+      </p:sp>
+      <p:pic>
         <p:nvPicPr>
           <p:cNvPr id="5" name="" descr=""/>
           <p:cNvPicPr>
@@ -2428,7 +2428,7 @@
           </a:prstGeom>
         </p:spPr>
       </p:pic>
-      <p:pic xmlns:a="http://schemas.openxmlformats.org/drawingml/2006/main" xmlns:r="http://schemas.openxmlformats.org/officeDocument/2006/relationships" xmlns:p="http://schemas.openxmlformats.org/presentationml/2006/main">
+      <p:pic>
         <p:nvPicPr>
           <p:cNvPr id="6" name="" descr=""/>
           <p:cNvPicPr>
@@ -2479,7 +2479,7 @@
           <a:chExt cx="0" cy="0"/>
         </a:xfrm>
       </p:grpSpPr>
-      <p:sp xmlns:a="http://schemas.openxmlformats.org/drawingml/2006/main" xmlns:r="http://schemas.openxmlformats.org/officeDocument/2006/relationships" xmlns:p="http://schemas.openxmlformats.org/presentationml/2006/main">
+      <p:sp>
         <p:nvSpPr>
           <p:cNvPr id="2" name="Title 1"/>
           <p:cNvSpPr>
@@ -2506,7 +2506,7 @@
           </a:p>
         </p:txBody>
       </p:sp>
-      <p:sp xmlns:a="http://schemas.openxmlformats.org/drawingml/2006/main" xmlns:r="http://schemas.openxmlformats.org/officeDocument/2006/relationships" xmlns:p="http://schemas.openxmlformats.org/presentationml/2006/main">
+      <p:sp>
         <p:nvSpPr>
           <p:cNvPr id="3" name="Content Placeholder 2"/>
           <p:cNvSpPr>
@@ -2629,7 +2629,7 @@
           <a:chExt cx="0" cy="0"/>
         </a:xfrm>
       </p:grpSpPr>
-      <p:sp xmlns:a="http://schemas.openxmlformats.org/drawingml/2006/main" xmlns:r="http://schemas.openxmlformats.org/officeDocument/2006/relationships" xmlns:p="http://schemas.openxmlformats.org/presentationml/2006/main">
+      <p:sp>
         <p:nvSpPr>
           <p:cNvPr id="2" name="Title 1"/>
           <p:cNvSpPr>
@@ -2656,7 +2656,7 @@
           </a:p>
         </p:txBody>
       </p:sp>
-      <p:pic xmlns:a="http://schemas.openxmlformats.org/drawingml/2006/main" xmlns:r="http://schemas.openxmlformats.org/officeDocument/2006/relationships" xmlns:p="http://schemas.openxmlformats.org/presentationml/2006/main">
+      <p:pic>
         <p:nvPicPr>
           <p:cNvPr id="3" name="" descr=""/>
           <p:cNvPicPr>
@@ -2707,7 +2707,7 @@
           <a:chExt cx="0" cy="0"/>
         </a:xfrm>
       </p:grpSpPr>
-      <p:sp xmlns:a="http://schemas.openxmlformats.org/drawingml/2006/main" xmlns:r="http://schemas.openxmlformats.org/officeDocument/2006/relationships" xmlns:p="http://schemas.openxmlformats.org/presentationml/2006/main">
+      <p:sp>
         <p:nvSpPr>
           <p:cNvPr id="2" name="Title 1"/>
           <p:cNvSpPr>
@@ -2734,7 +2734,7 @@
           </a:p>
         </p:txBody>
       </p:sp>
-      <p:pic xmlns:a="http://schemas.openxmlformats.org/drawingml/2006/main" xmlns:r="http://schemas.openxmlformats.org/officeDocument/2006/relationships" xmlns:p="http://schemas.openxmlformats.org/presentationml/2006/main">
+      <p:pic>
         <p:nvPicPr>
           <p:cNvPr id="3" name="" descr=""/>
           <p:cNvPicPr>
@@ -2785,7 +2785,7 @@
           <a:chExt cx="0" cy="0"/>
         </a:xfrm>
       </p:grpSpPr>
-      <p:sp xmlns:a="http://schemas.openxmlformats.org/drawingml/2006/main" xmlns:r="http://schemas.openxmlformats.org/officeDocument/2006/relationships" xmlns:p="http://schemas.openxmlformats.org/presentationml/2006/main">
+      <p:sp>
         <p:nvSpPr>
           <p:cNvPr id="2" name="Title 1"/>
           <p:cNvSpPr>
@@ -2812,7 +2812,7 @@
           </a:p>
         </p:txBody>
       </p:sp>
-      <p:pic xmlns:a="http://schemas.openxmlformats.org/drawingml/2006/main" xmlns:r="http://schemas.openxmlformats.org/officeDocument/2006/relationships" xmlns:p="http://schemas.openxmlformats.org/presentationml/2006/main">
+      <p:pic>
         <p:nvPicPr>
           <p:cNvPr id="3" name="" descr=""/>
           <p:cNvPicPr>
@@ -2863,7 +2863,7 @@
           <a:chExt cx="0" cy="0"/>
         </a:xfrm>
       </p:grpSpPr>
-      <p:sp xmlns:a="http://schemas.openxmlformats.org/drawingml/2006/main" xmlns:r="http://schemas.openxmlformats.org/officeDocument/2006/relationships" xmlns:p="http://schemas.openxmlformats.org/presentationml/2006/main">
+      <p:sp>
         <p:nvSpPr>
           <p:cNvPr id="2" name="Title 1"/>
           <p:cNvSpPr>
@@ -2890,7 +2890,7 @@
           </a:p>
         </p:txBody>
       </p:sp>
-      <p:sp xmlns:a="http://schemas.openxmlformats.org/drawingml/2006/main" xmlns:r="http://schemas.openxmlformats.org/officeDocument/2006/relationships" xmlns:p="http://schemas.openxmlformats.org/presentationml/2006/main">
+      <p:sp>
         <p:nvSpPr>
           <p:cNvPr id="3" name="Text Placeholder 4"/>
           <p:cNvSpPr>
@@ -2917,7 +2917,7 @@
           </a:p>
         </p:txBody>
       </p:sp>
-      <p:sp xmlns:a="http://schemas.openxmlformats.org/drawingml/2006/main" xmlns:r="http://schemas.openxmlformats.org/officeDocument/2006/relationships" xmlns:p="http://schemas.openxmlformats.org/presentationml/2006/main">
+      <p:sp>
         <p:nvSpPr>
           <p:cNvPr id="4" name="Text Placeholder 2"/>
           <p:cNvSpPr>
@@ -2944,7 +2944,7 @@
           </a:p>
         </p:txBody>
       </p:sp>
-      <p:pic xmlns:a="http://schemas.openxmlformats.org/drawingml/2006/main" xmlns:r="http://schemas.openxmlformats.org/officeDocument/2006/relationships" xmlns:p="http://schemas.openxmlformats.org/presentationml/2006/main">
+      <p:pic>
         <p:nvPicPr>
           <p:cNvPr id="5" name="" descr=""/>
           <p:cNvPicPr>
@@ -2970,7 +2970,7 @@
           </a:prstGeom>
         </p:spPr>
       </p:pic>
-      <p:pic xmlns:a="http://schemas.openxmlformats.org/drawingml/2006/main" xmlns:r="http://schemas.openxmlformats.org/officeDocument/2006/relationships" xmlns:p="http://schemas.openxmlformats.org/presentationml/2006/main">
+      <p:pic>
         <p:nvPicPr>
           <p:cNvPr id="6" name="" descr=""/>
           <p:cNvPicPr>
@@ -3021,7 +3021,7 @@
           <a:chExt cx="0" cy="0"/>
         </a:xfrm>
       </p:grpSpPr>
-      <p:sp xmlns:a="http://schemas.openxmlformats.org/drawingml/2006/main" xmlns:r="http://schemas.openxmlformats.org/officeDocument/2006/relationships" xmlns:p="http://schemas.openxmlformats.org/presentationml/2006/main">
+      <p:sp>
         <p:nvSpPr>
           <p:cNvPr id="2" name="Title 1"/>
           <p:cNvSpPr>
@@ -3048,7 +3048,7 @@
           </a:p>
         </p:txBody>
       </p:sp>
-      <p:sp xmlns:a="http://schemas.openxmlformats.org/drawingml/2006/main" xmlns:r="http://schemas.openxmlformats.org/officeDocument/2006/relationships" xmlns:p="http://schemas.openxmlformats.org/presentationml/2006/main">
+      <p:sp>
         <p:nvSpPr>
           <p:cNvPr id="3" name="Text Placeholder 4"/>
           <p:cNvSpPr>
@@ -3075,7 +3075,7 @@
           </a:p>
         </p:txBody>
       </p:sp>
-      <p:sp xmlns:a="http://schemas.openxmlformats.org/drawingml/2006/main" xmlns:r="http://schemas.openxmlformats.org/officeDocument/2006/relationships" xmlns:p="http://schemas.openxmlformats.org/presentationml/2006/main">
+      <p:sp>
         <p:nvSpPr>
           <p:cNvPr id="4" name="Text Placeholder 2"/>
           <p:cNvSpPr>
@@ -3102,7 +3102,7 @@
           </a:p>
         </p:txBody>
       </p:sp>
-      <p:pic xmlns:a="http://schemas.openxmlformats.org/drawingml/2006/main" xmlns:r="http://schemas.openxmlformats.org/officeDocument/2006/relationships" xmlns:p="http://schemas.openxmlformats.org/presentationml/2006/main">
+      <p:pic>
         <p:nvPicPr>
           <p:cNvPr id="5" name="" descr=""/>
           <p:cNvPicPr>
@@ -3128,7 +3128,7 @@
           </a:prstGeom>
         </p:spPr>
       </p:pic>
-      <p:pic xmlns:a="http://schemas.openxmlformats.org/drawingml/2006/main" xmlns:r="http://schemas.openxmlformats.org/officeDocument/2006/relationships" xmlns:p="http://schemas.openxmlformats.org/presentationml/2006/main">
+      <p:pic>
         <p:nvPicPr>
           <p:cNvPr id="6" name="" descr=""/>
           <p:cNvPicPr>
@@ -3179,7 +3179,7 @@
           <a:chExt cx="0" cy="0"/>
         </a:xfrm>
       </p:grpSpPr>
-      <p:sp xmlns:a="http://schemas.openxmlformats.org/drawingml/2006/main" xmlns:r="http://schemas.openxmlformats.org/officeDocument/2006/relationships" xmlns:p="http://schemas.openxmlformats.org/presentationml/2006/main">
+      <p:sp>
         <p:nvSpPr>
           <p:cNvPr id="2" name="Title 1"/>
           <p:cNvSpPr>
@@ -3206,7 +3206,7 @@
           </a:p>
         </p:txBody>
       </p:sp>
-      <p:sp xmlns:a="http://schemas.openxmlformats.org/drawingml/2006/main" xmlns:r="http://schemas.openxmlformats.org/officeDocument/2006/relationships" xmlns:p="http://schemas.openxmlformats.org/presentationml/2006/main">
+      <p:sp>
         <p:nvSpPr>
           <p:cNvPr id="3" name="Text Placeholder 4"/>
           <p:cNvSpPr>
@@ -3233,7 +3233,7 @@
           </a:p>
         </p:txBody>
       </p:sp>
-      <p:sp xmlns:a="http://schemas.openxmlformats.org/drawingml/2006/main" xmlns:r="http://schemas.openxmlformats.org/officeDocument/2006/relationships" xmlns:p="http://schemas.openxmlformats.org/presentationml/2006/main">
+      <p:sp>
         <p:nvSpPr>
           <p:cNvPr id="4" name="Text Placeholder 2"/>
           <p:cNvSpPr>
@@ -3260,7 +3260,7 @@
           </a:p>
         </p:txBody>
       </p:sp>
-      <p:pic xmlns:a="http://schemas.openxmlformats.org/drawingml/2006/main" xmlns:r="http://schemas.openxmlformats.org/officeDocument/2006/relationships" xmlns:p="http://schemas.openxmlformats.org/presentationml/2006/main">
+      <p:pic>
         <p:nvPicPr>
           <p:cNvPr id="5" name="" descr=""/>
           <p:cNvPicPr>
@@ -3286,7 +3286,7 @@
           </a:prstGeom>
         </p:spPr>
       </p:pic>
-      <p:pic xmlns:a="http://schemas.openxmlformats.org/drawingml/2006/main" xmlns:r="http://schemas.openxmlformats.org/officeDocument/2006/relationships" xmlns:p="http://schemas.openxmlformats.org/presentationml/2006/main">
+      <p:pic>
         <p:nvPicPr>
           <p:cNvPr id="6" name="" descr=""/>
           <p:cNvPicPr>
@@ -3337,7 +3337,7 @@
           <a:chExt cx="0" cy="0"/>
         </a:xfrm>
       </p:grpSpPr>
-      <p:sp xmlns:a="http://schemas.openxmlformats.org/drawingml/2006/main" xmlns:r="http://schemas.openxmlformats.org/officeDocument/2006/relationships" xmlns:p="http://schemas.openxmlformats.org/presentationml/2006/main">
+      <p:sp>
         <p:nvSpPr>
           <p:cNvPr id="2" name="Title 1"/>
           <p:cNvSpPr>
@@ -3364,7 +3364,7 @@
           </a:p>
         </p:txBody>
       </p:sp>
-      <p:sp xmlns:a="http://schemas.openxmlformats.org/drawingml/2006/main" xmlns:r="http://schemas.openxmlformats.org/officeDocument/2006/relationships" xmlns:p="http://schemas.openxmlformats.org/presentationml/2006/main">
+      <p:sp>
         <p:nvSpPr>
           <p:cNvPr id="3" name="Text Placeholder 4"/>
           <p:cNvSpPr>
@@ -3391,7 +3391,7 @@
           </a:p>
         </p:txBody>
       </p:sp>
-      <p:sp xmlns:a="http://schemas.openxmlformats.org/drawingml/2006/main" xmlns:r="http://schemas.openxmlformats.org/officeDocument/2006/relationships" xmlns:p="http://schemas.openxmlformats.org/presentationml/2006/main">
+      <p:sp>
         <p:nvSpPr>
           <p:cNvPr id="4" name="Text Placeholder 2"/>
           <p:cNvSpPr>
@@ -3418,7 +3418,7 @@
           </a:p>
         </p:txBody>
       </p:sp>
-      <p:pic xmlns:a="http://schemas.openxmlformats.org/drawingml/2006/main" xmlns:r="http://schemas.openxmlformats.org/officeDocument/2006/relationships" xmlns:p="http://schemas.openxmlformats.org/presentationml/2006/main">
+      <p:pic>
         <p:nvPicPr>
           <p:cNvPr id="5" name="" descr=""/>
           <p:cNvPicPr>
@@ -3444,7 +3444,7 @@
           </a:prstGeom>
         </p:spPr>
       </p:pic>
-      <p:pic xmlns:a="http://schemas.openxmlformats.org/drawingml/2006/main" xmlns:r="http://schemas.openxmlformats.org/officeDocument/2006/relationships" xmlns:p="http://schemas.openxmlformats.org/presentationml/2006/main">
+      <p:pic>
         <p:nvPicPr>
           <p:cNvPr id="6" name="" descr=""/>
           <p:cNvPicPr>
